--- a/IHK/Projekt-Präsi/Praesentation_KiourtzidisV2.pptx
+++ b/IHK/Projekt-Präsi/Praesentation_KiourtzidisV2.pptx
@@ -238,7 +238,7 @@
             </a:pPr>
             <a:fld id="{5282F153-3F37-0F45-9E97-73ACFA13230C}" type="datetimeFigureOut">
               <a:rPr lang="en-US"/>
-              <a:t>6/29/2026</a:t>
+              <a:t>7/5/2026</a:t>
             </a:fld>
             <a:endParaRPr lang="en-US"/>
           </a:p>
@@ -3355,54 +3355,6 @@
           <a:chExt cx="0" cy="0"/>
         </a:xfrm>
       </p:grpSpPr>
-      <p:sp>
-        <p:nvSpPr>
-          <p:cNvPr id="3" name="Textfeld 2">
-            <a:extLst>
-              <a:ext uri="{FF2B5EF4-FFF2-40B4-BE49-F238E27FC236}">
-                <a16:creationId xmlns:a16="http://schemas.microsoft.com/office/drawing/2014/main" id="{A15BADC9-E388-BD87-9DD6-A204363B647F}"/>
-              </a:ext>
-            </a:extLst>
-          </p:cNvPr>
-          <p:cNvSpPr txBox="1"/>
-          <p:nvPr userDrawn="1">
-            <p:extLst>
-              <p:ext uri="{1162E1C5-73C7-4A58-AE30-91384D911F3F}">
-                <p184:classification xmlns:p184="http://schemas.microsoft.com/office/powerpoint/2018/4/main" val="ftr"/>
-              </p:ext>
-            </p:extLst>
-          </p:nvPr>
-        </p:nvSpPr>
-        <p:spPr>
-          <a:xfrm>
-            <a:off x="8855075" y="4973320"/>
-            <a:ext cx="242888" cy="106680"/>
-          </a:xfrm>
-          <a:prstGeom prst="rect">
-            <a:avLst/>
-          </a:prstGeom>
-        </p:spPr>
-        <p:txBody>
-          <a:bodyPr horzOverflow="overflow" lIns="0" tIns="0" rIns="0" bIns="0">
-            <a:spAutoFit/>
-          </a:bodyPr>
-          <a:lstStyle/>
-          <a:p>
-            <a:pPr algn="l"/>
-            <a:r>
-              <a:rPr lang="de-DE" sz="700">
-                <a:solidFill>
-                  <a:srgbClr val="000000">
-                    <a:alpha val="50000"/>
-                  </a:srgbClr>
-                </a:solidFill>
-                <a:latin typeface="Aptos" panose="020B0004020202020204" pitchFamily="34" charset="0"/>
-              </a:rPr>
-              <a:t>intern</a:t>
-            </a:r>
-          </a:p>
-        </p:txBody>
-      </p:sp>
     </p:spTree>
   </p:cSld>
   <p:clrMap bg1="lt1" tx1="dk1" bg2="lt2" tx2="dk2" accent1="accent1" accent2="accent2" accent3="accent3" accent4="accent4" accent5="accent5" accent6="accent6" hlink="hlink" folHlink="folHlink"/>
@@ -3761,7 +3713,7 @@
                 <a:ea typeface="Calibri"/>
                 <a:cs typeface="Calibri"/>
               </a:rPr>
-              <a:t xml:space="preserve">Aufbau </a:t>
+              <a:t>Aufbau </a:t>
             </a:r>
             <a:r>
               <a:rPr lang="en-US" sz="3800" b="1" dirty="0" err="1">
@@ -3797,7 +3749,7 @@
                 <a:ea typeface="Calibri"/>
                 <a:cs typeface="Calibri"/>
               </a:rPr>
-              <a:t xml:space="preserve"> </a:t>
+              <a:t> </a:t>
             </a:r>
             <a:r>
               <a:rPr lang="en-US" sz="3800" b="1" dirty="0" err="1">
@@ -3833,7 +3785,7 @@
                 <a:ea typeface="Calibri"/>
                 <a:cs typeface="Calibri"/>
               </a:rPr>
-              <a:t xml:space="preserve"> IT-</a:t>
+              <a:t> IT-</a:t>
             </a:r>
             <a:r>
               <a:rPr lang="en-US" sz="3800" b="1" dirty="0" err="1">
@@ -3902,7 +3854,7 @@
                 <a:ea typeface="Calibri"/>
                 <a:cs typeface="Calibri"/>
               </a:rPr>
-              <a:t xml:space="preserve"> </a:t>
+              <a:t> </a:t>
             </a:r>
             <a:r>
               <a:rPr lang="en-US" sz="3800" b="1" dirty="0" err="1">
@@ -3938,7 +3890,7 @@
                 <a:ea typeface="Calibri"/>
                 <a:cs typeface="Calibri"/>
               </a:rPr>
-              <a:t xml:space="preserve"> </a:t>
+              <a:t> </a:t>
             </a:r>
             <a:r>
               <a:rPr lang="en-US" sz="3800" b="1" dirty="0" err="1">
@@ -3974,7 +3926,7 @@
                 <a:ea typeface="Calibri"/>
                 <a:cs typeface="Calibri"/>
               </a:rPr>
-              <a:t xml:space="preserve"> </a:t>
+              <a:t> </a:t>
             </a:r>
             <a:r>
               <a:rPr lang="en-US" sz="3800" b="1" dirty="0" err="1">
@@ -5663,7 +5615,7 @@
                 <a:ea typeface="Calibri"/>
                 <a:cs typeface="Calibri"/>
               </a:rPr>
-              <a:t xml:space="preserve"> &amp; </a:t>
+              <a:t> &amp; </a:t>
             </a:r>
             <a:r>
               <a:rPr lang="en-US" sz="1300" b="1" dirty="0" err="1">
@@ -6049,7 +6001,7 @@
                 <a:ea typeface="Calibri"/>
                 <a:cs typeface="Calibri"/>
               </a:rPr>
-              <a:t xml:space="preserve"> &amp; Problem</a:t>
+              <a:t> &amp; Problem</a:t>
             </a:r>
             <a:endParaRPr lang="en-US" sz="3200" dirty="0">
               <a:effectLst>
@@ -7752,7 +7704,7 @@
                 <a:ea typeface="Calibri"/>
                 <a:cs typeface="Calibri"/>
               </a:rPr>
-              <a:t xml:space="preserve"> </a:t>
+              <a:t> </a:t>
             </a:r>
             <a:r>
               <a:rPr lang="en-US" sz="2600" b="1" dirty="0" err="1">
@@ -7774,7 +7726,7 @@
                 <a:ea typeface="Calibri"/>
                 <a:cs typeface="Calibri"/>
               </a:rPr>
-              <a:t xml:space="preserve"> </a:t>
+              <a:t> </a:t>
             </a:r>
             <a:r>
               <a:rPr lang="en-US" sz="2600" b="1" dirty="0" err="1">
@@ -7796,7 +7748,7 @@
                 <a:ea typeface="Calibri"/>
                 <a:cs typeface="Calibri"/>
               </a:rPr>
-              <a:t xml:space="preserve"> &amp; Company</a:t>
+              <a:t> &amp; Company</a:t>
             </a:r>
             <a:endParaRPr lang="en-US" sz="2600" dirty="0"/>
           </a:p>
@@ -7911,7 +7863,7 @@
                 <a:ea typeface="Calibri"/>
                 <a:cs typeface="Calibri"/>
               </a:rPr>
-              <a:t xml:space="preserve">▪ </a:t>
+              <a:t>▪ </a:t>
             </a:r>
             <a:r>
               <a:rPr lang="en-US" sz="1300">
@@ -7943,7 +7895,7 @@
                 <a:ea typeface="Calibri"/>
                 <a:cs typeface="Calibri"/>
               </a:rPr>
-              <a:t xml:space="preserve">▪ </a:t>
+              <a:t>▪ </a:t>
             </a:r>
             <a:r>
               <a:rPr lang="en-US" sz="1300">
@@ -7975,7 +7927,7 @@
                 <a:ea typeface="Calibri"/>
                 <a:cs typeface="Calibri"/>
               </a:rPr>
-              <a:t xml:space="preserve">▪ </a:t>
+              <a:t>▪ </a:t>
             </a:r>
             <a:r>
               <a:rPr lang="en-US" sz="1300">
@@ -8007,7 +7959,7 @@
                 <a:ea typeface="Calibri"/>
                 <a:cs typeface="Calibri"/>
               </a:rPr>
-              <a:t xml:space="preserve">▪ </a:t>
+              <a:t>▪ </a:t>
             </a:r>
             <a:r>
               <a:rPr lang="en-US" sz="1300">
@@ -10141,7 +10093,7 @@
                 <a:ea typeface="Calibri"/>
                 <a:cs typeface="Calibri"/>
               </a:rPr>
-              <a:t xml:space="preserve"> VMs + Host-Rechner als überwachte Systeme</a:t>
+              <a:t> VMs + Host-Rechner als überwachte Systeme</a:t>
             </a:r>
             <a:endParaRPr lang="en-US" sz="1200"/>
           </a:p>
@@ -11459,7 +11411,7 @@
                 <a:ea typeface="Calibri"/>
                 <a:cs typeface="Calibri"/>
               </a:rPr>
-              <a:t xml:space="preserve"> der </a:t>
+              <a:t> der </a:t>
             </a:r>
             <a:r>
               <a:rPr lang="en-US" sz="2600" b="1" dirty="0" err="1">
@@ -13614,7 +13566,7 @@
                 <a:ea typeface="Calibri"/>
                 <a:cs typeface="Calibri"/>
               </a:rPr>
-              <a:t xml:space="preserve"> </a:t>
+              <a:t> </a:t>
             </a:r>
             <a:r>
               <a:rPr lang="en-US" sz="2600" b="1" dirty="0" err="1">
@@ -16869,7 +16821,7 @@
                 <a:ea typeface="Calibri"/>
                 <a:cs typeface="Calibri"/>
               </a:rPr>
-              <a:t xml:space="preserve"> – Schritt für Schritt</a:t>
+              <a:t> – Schritt für Schritt</a:t>
             </a:r>
             <a:endParaRPr lang="en-US" sz="2600" dirty="0"/>
           </a:p>
@@ -17712,7 +17664,7 @@
                 <a:ea typeface="Calibri"/>
                 <a:cs typeface="Calibri"/>
               </a:rPr>
-              <a:t xml:space="preserve"> – Schritt für Schritt</a:t>
+              <a:t> – Schritt für Schritt</a:t>
             </a:r>
             <a:endParaRPr lang="en-US" sz="2600" dirty="0"/>
           </a:p>
@@ -18296,7 +18248,7 @@
                 <a:ea typeface="Calibri"/>
                 <a:cs typeface="Calibri"/>
               </a:rPr>
-              <a:t xml:space="preserve">Alert-Regeln (CPU &gt;90%, RAM &gt;85%, Disk </a:t>
+              <a:t>Alert-Regeln (CPU &gt;90%, RAM &gt;85%, Disk </a:t>
             </a:r>
             <a:r>
               <a:rPr lang="de-DE" sz="1100">
@@ -18530,7 +18482,7 @@
                 <a:ea typeface="Calibri"/>
                 <a:cs typeface="Calibri"/>
               </a:rPr>
-              <a:t xml:space="preserve">Tests &amp; </a:t>
+              <a:t>Tests &amp; </a:t>
             </a:r>
             <a:r>
               <a:rPr lang="en-US" sz="3200" b="1" dirty="0" err="1">
@@ -20288,7 +20240,7 @@
                 <a:ea typeface="Calibri"/>
                 <a:cs typeface="Calibri"/>
               </a:rPr>
-              <a:t xml:space="preserve"> &amp; </a:t>
+              <a:t> &amp; </a:t>
             </a:r>
             <a:r>
               <a:rPr lang="en-US" sz="3200" b="1" dirty="0" err="1">
@@ -22504,7 +22456,7 @@
                           <a:ea typeface="Calibri"/>
                           <a:cs typeface="Calibri"/>
                         </a:rPr>
-                        <a:t xml:space="preserve">★★★★☆  </a:t>
+                        <a:t>★★★★☆  </a:t>
                       </a:r>
                       <a:r>
                         <a:rPr lang="en-US" sz="1200" dirty="0">
@@ -22572,7 +22524,7 @@
                           <a:ea typeface="Calibri"/>
                           <a:cs typeface="Calibri"/>
                         </a:rPr>
-                        <a:t xml:space="preserve">★★★☆☆  </a:t>
+                        <a:t>★★★☆☆  </a:t>
                       </a:r>
                       <a:r>
                         <a:rPr lang="en-US" sz="1200" dirty="0">
@@ -22654,7 +22606,7 @@
                           <a:ea typeface="Calibri"/>
                           <a:cs typeface="Calibri"/>
                         </a:rPr>
-                        <a:t xml:space="preserve"> (</a:t>
+                        <a:t> (</a:t>
                       </a:r>
                       <a:r>
                         <a:rPr lang="en-US" sz="1200" b="1" dirty="0" err="1">
@@ -22771,7 +22723,7 @@
                           <a:ea typeface="Calibri"/>
                           <a:cs typeface="Calibri"/>
                         </a:rPr>
-                        <a:t xml:space="preserve">74 </a:t>
+                        <a:t>74 </a:t>
                       </a:r>
                       <a:r>
                         <a:rPr lang="en-US" sz="1200" b="1" dirty="0" err="1">
@@ -22835,7 +22787,7 @@
                           <a:ea typeface="Calibri"/>
                           <a:cs typeface="Calibri"/>
                         </a:rPr>
-                        <a:t xml:space="preserve">120 </a:t>
+                        <a:t>120 </a:t>
                       </a:r>
                       <a:r>
                         <a:rPr lang="en-US" sz="1200" b="1" dirty="0" err="1">
@@ -23202,7 +23154,7 @@
                 <a:ea typeface="Calibri"/>
                 <a:cs typeface="Calibri"/>
               </a:rPr>
-              <a:t xml:space="preserve"> &amp; </a:t>
+              <a:t> &amp; </a:t>
             </a:r>
             <a:r>
               <a:rPr lang="en-US" sz="3200" b="1" dirty="0" err="1">
@@ -35003,7 +34955,7 @@
                 <a:ea typeface="Calibri"/>
                 <a:cs typeface="Calibri"/>
               </a:rPr>
-              <a:t xml:space="preserve">Tests &amp; </a:t>
+              <a:t>Tests &amp; </a:t>
             </a:r>
             <a:r>
               <a:rPr lang="en-US" sz="1300" b="1" dirty="0" err="1">
@@ -36647,7 +36599,7 @@
                 <a:ea typeface="Calibri"/>
                 <a:cs typeface="Calibri"/>
               </a:rPr>
-              <a:t xml:space="preserve">Tests &amp; </a:t>
+              <a:t>Tests &amp; </a:t>
             </a:r>
             <a:r>
               <a:rPr lang="en-US" sz="1300" b="1" dirty="0" err="1">
@@ -36843,7 +36795,7 @@
                 <a:ea typeface="Calibri"/>
                 <a:cs typeface="Calibri"/>
               </a:rPr>
-              <a:t xml:space="preserve"> &amp; </a:t>
+              <a:t> &amp; </a:t>
             </a:r>
             <a:r>
               <a:rPr lang="en-US" sz="1300" b="1" dirty="0" err="1">
